--- a/dist/초1/도덕·윤리/자신과타인/초1_도덕·윤리_자신과타인_01_나는소중해요.pptx
+++ b/dist/초1/도덕·윤리/자신과타인/초1_도덕·윤리_자신과타인_01_나는소중해요.pptx
@@ -120,13 +120,13 @@
   <p:extLst>
     <p:ext uri="{521415D9-36F7-43E2-AB2F-B90AF26B5E84}">
       <p14:sectionLst xmlns:p14="http://schemas.microsoft.com/office/powerpoint/2010/main">
-        <p14:section name="도입" id="{991b7b55-9cd6-2428-d024-46a4548b60aa}">
+        <p14:section name="도입" id="{bb25ba05-1cbd-80a7-a3dd-201d764a3a79}">
           <p14:sldIdLst>
             <p14:sldId id="256"/>
             <p14:sldId id="257"/>
           </p14:sldIdLst>
         </p14:section>
-        <p14:section name="개념" id="{f089d391-322b-cd8b-7573-d9a48ff5bb1a}">
+        <p14:section name="개념" id="{67c49607-568c-64a4-53ad-abfee2c18b4e}">
           <p14:sldIdLst>
             <p14:sldId id="258"/>
             <p14:sldId id="259"/>
@@ -134,26 +134,26 @@
             <p14:sldId id="261"/>
           </p14:sldIdLst>
         </p14:section>
-        <p14:section name="연습" id="{baf7d3fe-aaf4-8b07-5a4c-c5a67b6d9bb8}">
+        <p14:section name="연습" id="{8b821a21-16d6-09df-65f2-d9c23f45c3c1}">
           <p14:sldIdLst>
             <p14:sldId id="262"/>
             <p14:sldId id="263"/>
             <p14:sldId id="264"/>
           </p14:sldIdLst>
         </p14:section>
-        <p14:section name="확인" id="{e7ed75ed-230a-8b7f-7f92-52e8c287f895}">
+        <p14:section name="확인" id="{f82b8680-b7f0-6cb7-77f1-e11ba2086adb}">
           <p14:sldIdLst>
             <p14:sldId id="265"/>
             <p14:sldId id="266"/>
             <p14:sldId id="267"/>
           </p14:sldIdLst>
         </p14:section>
-        <p14:section name="정리" id="{bf6126b1-8099-f4ba-962e-023f35373cee}">
+        <p14:section name="정리" id="{ad9947a6-1520-c6d9-4b42-4cee160ef242}">
           <p14:sldIdLst>
             <p14:sldId id="268"/>
           </p14:sldIdLst>
         </p14:section>
-        <p14:section name="보충" id="{a8f4fc0f-d745-bdfa-0153-46c4920a32b9}">
+        <p14:section name="보충" id="{d0947689-f353-239c-2450-81c7c0b68712}">
           <p14:sldIdLst>
             <p14:sldId id="269"/>
           </p14:sldIdLst>
